--- a/generated/Tier 1 Broker Scorecards/Reliance Partners, LLC_Broker_Scorecard.pptx
+++ b/generated/Tier 1 Broker Scorecards/Reliance Partners, LLC_Broker_Scorecard.pptx
@@ -3357,7 +3357,7 @@
                         <a:rPr sz="800">
                           <a:latin typeface="Segoe UI"/>
                         </a:rPr>
-                        <a:t>$11,296,745.54 / $11,930,854.99 / $3,616,801.94</a:t>
+                        <a:t>$11,296,745.54 / $12,013,010.64 / $3,698,957.59</a:t>
                       </a:r>
                     </a:p>
                   </a:txBody>
@@ -3394,7 +3394,7 @@
                         <a:rPr sz="900">
                           <a:latin typeface="Segoe UI"/>
                         </a:rPr>
-                        <a:t>Tier 1  |  1.83% / 15.00%</a:t>
+                        <a:t>Tier 1  |  1.87% / 15.00%</a:t>
                       </a:r>
                     </a:p>
                   </a:txBody>
@@ -3431,7 +3431,7 @@
                         <a:rPr sz="900">
                           <a:latin typeface="Segoe UI"/>
                         </a:rPr>
-                        <a:t>$15,815,443.76  (22.9% achieved)</a:t>
+                        <a:t>$15,815,443.76  (23.4% achieved)</a:t>
                       </a:r>
                     </a:p>
                   </a:txBody>
@@ -3653,7 +3653,7 @@
                         <a:rPr sz="900">
                           <a:latin typeface="Segoe UI"/>
                         </a:rPr>
-                        <a:t>Fleet Subs: 998  |  Binds: 21</a:t>
+                        <a:t>Fleet Subs: 1010  |  Binds: 23</a:t>
                       </a:r>
                     </a:p>
                   </a:txBody>
@@ -3690,7 +3690,7 @@
                         <a:rPr sz="900">
                           <a:latin typeface="Segoe UI"/>
                         </a:rPr>
-                        <a:t>Fleet Bound Premium: $1,782,542.59</a:t>
+                        <a:t>Fleet Bound Premium: $1,934,069.56</a:t>
                       </a:r>
                     </a:p>
                   </a:txBody>
@@ -3727,7 +3727,7 @@
                         <a:rPr sz="900">
                           <a:latin typeface="Segoe UI"/>
                         </a:rPr>
-                        <a:t>Fleet Book %: 49.3%</a:t>
+                        <a:t>Fleet Book %: 52.3%</a:t>
                       </a:r>
                     </a:p>
                   </a:txBody>
@@ -3766,7 +3766,7 @@
                         <a:rPr sz="900">
                           <a:latin typeface="Segoe UI"/>
                         </a:rPr>
-                        <a:t>Non-Fleet Subs: 4970  |  Binds: 88</a:t>
+                        <a:t>Non-Fleet Subs: 5028  |  Binds: 90</a:t>
                       </a:r>
                     </a:p>
                   </a:txBody>
@@ -3803,7 +3803,7 @@
                         <a:rPr sz="900">
                           <a:latin typeface="Segoe UI"/>
                         </a:rPr>
-                        <a:t>Non-Fleet Bound Premium: $1,834,259.35</a:t>
+                        <a:t>Non-Fleet Bound Premium: $1,764,888.03</a:t>
                       </a:r>
                     </a:p>
                   </a:txBody>
@@ -3840,7 +3840,7 @@
                         <a:rPr sz="900">
                           <a:latin typeface="Segoe UI"/>
                         </a:rPr>
-                        <a:t>Non-Fleet Book %: 50.7%</a:t>
+                        <a:t>Non-Fleet Book %: 47.7%</a:t>
                       </a:r>
                     </a:p>
                   </a:txBody>
@@ -4428,7 +4428,7 @@
                           </a:solidFill>
                           <a:latin typeface="Segoe UI"/>
                         </a:rPr>
-                        <a:t>623</a:t>
+                        <a:t>695</a:t>
                       </a:r>
                     </a:p>
                   </a:txBody>
@@ -4465,7 +4465,7 @@
                         <a:rPr sz="800">
                           <a:latin typeface="Segoe UI"/>
                         </a:rPr>
-                        <a:t>1569</a:t>
+                        <a:t>1568</a:t>
                       </a:r>
                     </a:p>
                   </a:txBody>
@@ -4581,7 +4581,7 @@
                         <a:rPr sz="800">
                           <a:latin typeface="Segoe UI"/>
                         </a:rPr>
-                        <a:t>5.5%</a:t>
+                        <a:t>5.4%</a:t>
                       </a:r>
                     </a:p>
                   </a:txBody>
@@ -4664,7 +4664,7 @@
                         <a:rPr sz="800">
                           <a:latin typeface="Segoe UI"/>
                         </a:rPr>
-                        <a:t>5.0%</a:t>
+                        <a:t>4.9%</a:t>
                       </a:r>
                     </a:p>
                   </a:txBody>
@@ -4707,7 +4707,7 @@
                           </a:solidFill>
                           <a:latin typeface="Segoe UI"/>
                         </a:rPr>
-                        <a:t>3.5%</a:t>
+                        <a:t>3.7%</a:t>
                       </a:r>
                     </a:p>
                   </a:txBody>
@@ -4747,7 +4747,7 @@
                         <a:rPr sz="800">
                           <a:latin typeface="Segoe UI"/>
                         </a:rPr>
-                        <a:t>5.7%</a:t>
+                        <a:t>5.5%</a:t>
                       </a:r>
                     </a:p>
                   </a:txBody>
@@ -4866,7 +4866,7 @@
                         <a:rPr sz="800">
                           <a:latin typeface="Segoe UI"/>
                         </a:rPr>
-                        <a:t>85</a:t>
+                        <a:t>84</a:t>
                       </a:r>
                     </a:p>
                   </a:txBody>
@@ -4943,7 +4943,7 @@
                         <a:rPr sz="800">
                           <a:latin typeface="Segoe UI"/>
                         </a:rPr>
-                        <a:t>73</a:t>
+                        <a:t>72</a:t>
                       </a:r>
                     </a:p>
                   </a:txBody>
@@ -4983,7 +4983,7 @@
                           </a:solidFill>
                           <a:latin typeface="Segoe UI"/>
                         </a:rPr>
-                        <a:t>22</a:t>
+                        <a:t>26</a:t>
                       </a:r>
                     </a:p>
                   </a:txBody>
@@ -5020,7 +5020,7 @@
                         <a:rPr sz="800">
                           <a:latin typeface="Segoe UI"/>
                         </a:rPr>
-                        <a:t>89</a:t>
+                        <a:t>87</a:t>
                       </a:r>
                     </a:p>
                   </a:txBody>
@@ -5262,7 +5262,7 @@
                           </a:solidFill>
                           <a:latin typeface="Segoe UI"/>
                         </a:rPr>
-                        <a:t>$407.0K</a:t>
+                        <a:t>$489.2K</a:t>
                       </a:r>
                     </a:p>
                   </a:txBody>

--- a/generated/Tier 1 Broker Scorecards/Reliance Partners, LLC_Broker_Scorecard.pptx
+++ b/generated/Tier 1 Broker Scorecards/Reliance Partners, LLC_Broker_Scorecard.pptx
@@ -3394,7 +3394,7 @@
                         <a:rPr sz="900">
                           <a:latin typeface="Segoe UI"/>
                         </a:rPr>
-                        <a:t>Tier 1  |  1.87% / 15.00%</a:t>
+                        <a:t>Tier 1  |  1.80% / 15.00%</a:t>
                       </a:r>
                     </a:p>
                   </a:txBody>
@@ -3653,7 +3653,7 @@
                         <a:rPr sz="900">
                           <a:latin typeface="Segoe UI"/>
                         </a:rPr>
-                        <a:t>Fleet Subs: 1010  |  Binds: 23</a:t>
+                        <a:t>Fleet Subs: 1017  |  Binds: 21</a:t>
                       </a:r>
                     </a:p>
                   </a:txBody>
@@ -3690,7 +3690,7 @@
                         <a:rPr sz="900">
                           <a:latin typeface="Segoe UI"/>
                         </a:rPr>
-                        <a:t>Fleet Bound Premium: $1,934,069.56</a:t>
+                        <a:t>Fleet Bound Premium: $1,852,008.42</a:t>
                       </a:r>
                     </a:p>
                   </a:txBody>
@@ -3727,7 +3727,7 @@
                         <a:rPr sz="900">
                           <a:latin typeface="Segoe UI"/>
                         </a:rPr>
-                        <a:t>Fleet Book %: 52.3%</a:t>
+                        <a:t>Fleet Book %: 50.1%</a:t>
                       </a:r>
                     </a:p>
                   </a:txBody>
@@ -3766,7 +3766,7 @@
                         <a:rPr sz="900">
                           <a:latin typeface="Segoe UI"/>
                         </a:rPr>
-                        <a:t>Non-Fleet Subs: 5028  |  Binds: 90</a:t>
+                        <a:t>Non-Fleet Subs: 5093  |  Binds: 89</a:t>
                       </a:r>
                     </a:p>
                   </a:txBody>
@@ -3803,7 +3803,7 @@
                         <a:rPr sz="900">
                           <a:latin typeface="Segoe UI"/>
                         </a:rPr>
-                        <a:t>Non-Fleet Bound Premium: $1,764,888.03</a:t>
+                        <a:t>Non-Fleet Bound Premium: $1,846,949.17</a:t>
                       </a:r>
                     </a:p>
                   </a:txBody>
@@ -3840,7 +3840,7 @@
                         <a:rPr sz="900">
                           <a:latin typeface="Segoe UI"/>
                         </a:rPr>
-                        <a:t>Non-Fleet Book %: 47.7%</a:t>
+                        <a:t>Non-Fleet Book %: 49.9%</a:t>
                       </a:r>
                     </a:p>
                   </a:txBody>
@@ -4428,7 +4428,7 @@
                           </a:solidFill>
                           <a:latin typeface="Segoe UI"/>
                         </a:rPr>
-                        <a:t>695</a:t>
+                        <a:t>771</a:t>
                       </a:r>
                     </a:p>
                   </a:txBody>
@@ -4581,7 +4581,7 @@
                         <a:rPr sz="800">
                           <a:latin typeface="Segoe UI"/>
                         </a:rPr>
-                        <a:t>5.4%</a:t>
+                        <a:t>5.5%</a:t>
                       </a:r>
                     </a:p>
                   </a:txBody>
@@ -4707,7 +4707,7 @@
                           </a:solidFill>
                           <a:latin typeface="Segoe UI"/>
                         </a:rPr>
-                        <a:t>3.7%</a:t>
+                        <a:t>3.2%</a:t>
                       </a:r>
                     </a:p>
                   </a:txBody>
@@ -4747,7 +4747,7 @@
                         <a:rPr sz="800">
                           <a:latin typeface="Segoe UI"/>
                         </a:rPr>
-                        <a:t>5.5%</a:t>
+                        <a:t>5.7%</a:t>
                       </a:r>
                     </a:p>
                   </a:txBody>
@@ -4866,7 +4866,7 @@
                         <a:rPr sz="800">
                           <a:latin typeface="Segoe UI"/>
                         </a:rPr>
-                        <a:t>84</a:t>
+                        <a:t>85</a:t>
                       </a:r>
                     </a:p>
                   </a:txBody>
@@ -4983,7 +4983,7 @@
                           </a:solidFill>
                           <a:latin typeface="Segoe UI"/>
                         </a:rPr>
-                        <a:t>26</a:t>
+                        <a:t>25</a:t>
                       </a:r>
                     </a:p>
                   </a:txBody>
@@ -5020,7 +5020,7 @@
                         <a:rPr sz="800">
                           <a:latin typeface="Segoe UI"/>
                         </a:rPr>
-                        <a:t>87</a:t>
+                        <a:t>89</a:t>
                       </a:r>
                     </a:p>
                   </a:txBody>

--- a/generated/Tier 1 Broker Scorecards/Reliance Partners, LLC_Broker_Scorecard.pptx
+++ b/generated/Tier 1 Broker Scorecards/Reliance Partners, LLC_Broker_Scorecard.pptx
@@ -3357,7 +3357,7 @@
                         <a:rPr sz="800">
                           <a:latin typeface="Segoe UI"/>
                         </a:rPr>
-                        <a:t>$11,296,745.54 / $12,013,010.64 / $3,698,957.59</a:t>
+                        <a:t>$11,296,745.54 / $12,093,939.55 / $3,779,886.50</a:t>
                       </a:r>
                     </a:p>
                   </a:txBody>
@@ -3394,7 +3394,7 @@
                         <a:rPr sz="900">
                           <a:latin typeface="Segoe UI"/>
                         </a:rPr>
-                        <a:t>Tier 1  |  1.80% / 15.00%</a:t>
+                        <a:t>Tier 1  |  1.78% / 15.00%</a:t>
                       </a:r>
                     </a:p>
                   </a:txBody>
@@ -3431,7 +3431,7 @@
                         <a:rPr sz="900">
                           <a:latin typeface="Segoe UI"/>
                         </a:rPr>
-                        <a:t>$15,815,443.76  (23.4% achieved)</a:t>
+                        <a:t>$15,815,443.76  (23.9% achieved)</a:t>
                       </a:r>
                     </a:p>
                   </a:txBody>
@@ -3653,7 +3653,7 @@
                         <a:rPr sz="900">
                           <a:latin typeface="Segoe UI"/>
                         </a:rPr>
-                        <a:t>Fleet Subs: 1017  |  Binds: 21</a:t>
+                        <a:t>Fleet Subs: 1026  |  Binds: 20</a:t>
                       </a:r>
                     </a:p>
                   </a:txBody>
@@ -3690,7 +3690,7 @@
                         <a:rPr sz="900">
                           <a:latin typeface="Segoe UI"/>
                         </a:rPr>
-                        <a:t>Fleet Bound Premium: $1,852,008.42</a:t>
+                        <a:t>Fleet Bound Premium: $1,811,693.25</a:t>
                       </a:r>
                     </a:p>
                   </a:txBody>
@@ -3727,7 +3727,7 @@
                         <a:rPr sz="900">
                           <a:latin typeface="Segoe UI"/>
                         </a:rPr>
-                        <a:t>Fleet Book %: 50.1%</a:t>
+                        <a:t>Fleet Book %: 47.9%</a:t>
                       </a:r>
                     </a:p>
                   </a:txBody>
@@ -3766,7 +3766,7 @@
                         <a:rPr sz="900">
                           <a:latin typeface="Segoe UI"/>
                         </a:rPr>
-                        <a:t>Non-Fleet Subs: 5093  |  Binds: 89</a:t>
+                        <a:t>Non-Fleet Subs: 5149  |  Binds: 90</a:t>
                       </a:r>
                     </a:p>
                   </a:txBody>
@@ -3803,7 +3803,7 @@
                         <a:rPr sz="900">
                           <a:latin typeface="Segoe UI"/>
                         </a:rPr>
-                        <a:t>Non-Fleet Bound Premium: $1,846,949.17</a:t>
+                        <a:t>Non-Fleet Bound Premium: $1,968,193.25</a:t>
                       </a:r>
                     </a:p>
                   </a:txBody>
@@ -3840,7 +3840,7 @@
                         <a:rPr sz="900">
                           <a:latin typeface="Segoe UI"/>
                         </a:rPr>
-                        <a:t>Non-Fleet Book %: 49.9%</a:t>
+                        <a:t>Non-Fleet Book %: 52.1%</a:t>
                       </a:r>
                     </a:p>
                   </a:txBody>
@@ -4428,7 +4428,7 @@
                           </a:solidFill>
                           <a:latin typeface="Segoe UI"/>
                         </a:rPr>
-                        <a:t>771</a:t>
+                        <a:t>841</a:t>
                       </a:r>
                     </a:p>
                   </a:txBody>
@@ -4581,7 +4581,7 @@
                         <a:rPr sz="800">
                           <a:latin typeface="Segoe UI"/>
                         </a:rPr>
-                        <a:t>5.5%</a:t>
+                        <a:t>5.4%</a:t>
                       </a:r>
                     </a:p>
                   </a:txBody>
@@ -4664,7 +4664,7 @@
                         <a:rPr sz="800">
                           <a:latin typeface="Segoe UI"/>
                         </a:rPr>
-                        <a:t>4.9%</a:t>
+                        <a:t>5.0%</a:t>
                       </a:r>
                     </a:p>
                   </a:txBody>
@@ -4866,7 +4866,7 @@
                         <a:rPr sz="800">
                           <a:latin typeface="Segoe UI"/>
                         </a:rPr>
-                        <a:t>85</a:t>
+                        <a:t>84</a:t>
                       </a:r>
                     </a:p>
                   </a:txBody>
@@ -4906,7 +4906,7 @@
                           </a:solidFill>
                           <a:latin typeface="Segoe UI"/>
                         </a:rPr>
-                        <a:t>46</a:t>
+                        <a:t>47</a:t>
                       </a:r>
                     </a:p>
                   </a:txBody>
@@ -4943,7 +4943,7 @@
                         <a:rPr sz="800">
                           <a:latin typeface="Segoe UI"/>
                         </a:rPr>
-                        <a:t>72</a:t>
+                        <a:t>73</a:t>
                       </a:r>
                     </a:p>
                   </a:txBody>
@@ -4983,7 +4983,7 @@
                           </a:solidFill>
                           <a:latin typeface="Segoe UI"/>
                         </a:rPr>
-                        <a:t>25</a:t>
+                        <a:t>27</a:t>
                       </a:r>
                     </a:p>
                   </a:txBody>
@@ -5262,7 +5262,7 @@
                           </a:solidFill>
                           <a:latin typeface="Segoe UI"/>
                         </a:rPr>
-                        <a:t>$489.2K</a:t>
+                        <a:t>$570.1K</a:t>
                       </a:r>
                     </a:p>
                   </a:txBody>

--- a/generated/Tier 1 Broker Scorecards/Reliance Partners, LLC_Broker_Scorecard.pptx
+++ b/generated/Tier 1 Broker Scorecards/Reliance Partners, LLC_Broker_Scorecard.pptx
@@ -3357,7 +3357,7 @@
                         <a:rPr sz="800">
                           <a:latin typeface="Segoe UI"/>
                         </a:rPr>
-                        <a:t>$11,296,745.54 / $12,093,939.55 / $3,779,886.50</a:t>
+                        <a:t>$11,296,745.54 / $12,116,122.14 / $3,802,069.09</a:t>
                       </a:r>
                     </a:p>
                   </a:txBody>
@@ -3394,7 +3394,7 @@
                         <a:rPr sz="900">
                           <a:latin typeface="Segoe UI"/>
                         </a:rPr>
-                        <a:t>Tier 1  |  1.78% / 15.00%</a:t>
+                        <a:t>Tier 1  |  1.82% / 15.00%</a:t>
                       </a:r>
                     </a:p>
                   </a:txBody>
@@ -3431,7 +3431,7 @@
                         <a:rPr sz="900">
                           <a:latin typeface="Segoe UI"/>
                         </a:rPr>
-                        <a:t>$15,815,443.76  (23.9% achieved)</a:t>
+                        <a:t>$15,815,443.76  (24.0% achieved)</a:t>
                       </a:r>
                     </a:p>
                   </a:txBody>
@@ -3653,7 +3653,7 @@
                         <a:rPr sz="900">
                           <a:latin typeface="Segoe UI"/>
                         </a:rPr>
-                        <a:t>Fleet Subs: 1026  |  Binds: 20</a:t>
+                        <a:t>Fleet Subs: 1041  |  Binds: 21</a:t>
                       </a:r>
                     </a:p>
                   </a:txBody>
@@ -3690,7 +3690,7 @@
                         <a:rPr sz="900">
                           <a:latin typeface="Segoe UI"/>
                         </a:rPr>
-                        <a:t>Fleet Bound Premium: $1,811,693.25</a:t>
+                        <a:t>Fleet Bound Premium: $1,895,457.44</a:t>
                       </a:r>
                     </a:p>
                   </a:txBody>
@@ -3727,7 +3727,7 @@
                         <a:rPr sz="900">
                           <a:latin typeface="Segoe UI"/>
                         </a:rPr>
-                        <a:t>Fleet Book %: 47.9%</a:t>
+                        <a:t>Fleet Book %: 49.9%</a:t>
                       </a:r>
                     </a:p>
                   </a:txBody>
@@ -3766,7 +3766,7 @@
                         <a:rPr sz="900">
                           <a:latin typeface="Segoe UI"/>
                         </a:rPr>
-                        <a:t>Non-Fleet Subs: 5149  |  Binds: 90</a:t>
+                        <a:t>Non-Fleet Subs: 5166  |  Binds: 92</a:t>
                       </a:r>
                     </a:p>
                   </a:txBody>
@@ -3803,7 +3803,7 @@
                         <a:rPr sz="900">
                           <a:latin typeface="Segoe UI"/>
                         </a:rPr>
-                        <a:t>Non-Fleet Bound Premium: $1,968,193.25</a:t>
+                        <a:t>Non-Fleet Bound Premium: $1,906,611.65</a:t>
                       </a:r>
                     </a:p>
                   </a:txBody>
@@ -3840,7 +3840,7 @@
                         <a:rPr sz="900">
                           <a:latin typeface="Segoe UI"/>
                         </a:rPr>
-                        <a:t>Non-Fleet Book %: 52.1%</a:t>
+                        <a:t>Non-Fleet Book %: 50.1%</a:t>
                       </a:r>
                     </a:p>
                   </a:txBody>
@@ -4428,7 +4428,7 @@
                           </a:solidFill>
                           <a:latin typeface="Segoe UI"/>
                         </a:rPr>
-                        <a:t>841</a:t>
+                        <a:t>874</a:t>
                       </a:r>
                     </a:p>
                   </a:txBody>
@@ -4581,7 +4581,7 @@
                         <a:rPr sz="800">
                           <a:latin typeface="Segoe UI"/>
                         </a:rPr>
-                        <a:t>5.4%</a:t>
+                        <a:t>5.5%</a:t>
                       </a:r>
                     </a:p>
                   </a:txBody>
@@ -4747,7 +4747,7 @@
                         <a:rPr sz="800">
                           <a:latin typeface="Segoe UI"/>
                         </a:rPr>
-                        <a:t>5.7%</a:t>
+                        <a:t>5.6%</a:t>
                       </a:r>
                     </a:p>
                   </a:txBody>
@@ -4866,7 +4866,7 @@
                         <a:rPr sz="800">
                           <a:latin typeface="Segoe UI"/>
                         </a:rPr>
-                        <a:t>84</a:t>
+                        <a:t>85</a:t>
                       </a:r>
                     </a:p>
                   </a:txBody>
@@ -4906,7 +4906,7 @@
                           </a:solidFill>
                           <a:latin typeface="Segoe UI"/>
                         </a:rPr>
-                        <a:t>47</a:t>
+                        <a:t>46</a:t>
                       </a:r>
                     </a:p>
                   </a:txBody>
@@ -4983,7 +4983,7 @@
                           </a:solidFill>
                           <a:latin typeface="Segoe UI"/>
                         </a:rPr>
-                        <a:t>27</a:t>
+                        <a:t>28</a:t>
                       </a:r>
                     </a:p>
                   </a:txBody>
@@ -5020,7 +5020,7 @@
                         <a:rPr sz="800">
                           <a:latin typeface="Segoe UI"/>
                         </a:rPr>
-                        <a:t>89</a:t>
+                        <a:t>88</a:t>
                       </a:r>
                     </a:p>
                   </a:txBody>
@@ -5262,7 +5262,7 @@
                           </a:solidFill>
                           <a:latin typeface="Segoe UI"/>
                         </a:rPr>
-                        <a:t>$570.1K</a:t>
+                        <a:t>$592.3K</a:t>
                       </a:r>
                     </a:p>
                   </a:txBody>

--- a/generated/Tier 1 Broker Scorecards/Reliance Partners, LLC_Broker_Scorecard.pptx
+++ b/generated/Tier 1 Broker Scorecards/Reliance Partners, LLC_Broker_Scorecard.pptx
@@ -3357,7 +3357,7 @@
                         <a:rPr sz="800">
                           <a:latin typeface="Segoe UI"/>
                         </a:rPr>
-                        <a:t>$11,296,745.54 / $12,116,122.14 / $3,802,069.09</a:t>
+                        <a:t>$11,296,745.54 / $12,142,828.01 / $3,828,774.96</a:t>
                       </a:r>
                     </a:p>
                   </a:txBody>
@@ -3394,7 +3394,7 @@
                         <a:rPr sz="900">
                           <a:latin typeface="Segoe UI"/>
                         </a:rPr>
-                        <a:t>Tier 1  |  1.82% / 15.00%</a:t>
+                        <a:t>Tier 1  |  1.74% / 15.00%</a:t>
                       </a:r>
                     </a:p>
                   </a:txBody>
@@ -3431,7 +3431,7 @@
                         <a:rPr sz="900">
                           <a:latin typeface="Segoe UI"/>
                         </a:rPr>
-                        <a:t>$15,815,443.76  (24.0% achieved)</a:t>
+                        <a:t>$15,815,443.76  (24.2% achieved)</a:t>
                       </a:r>
                     </a:p>
                   </a:txBody>
@@ -3653,7 +3653,7 @@
                         <a:rPr sz="900">
                           <a:latin typeface="Segoe UI"/>
                         </a:rPr>
-                        <a:t>Fleet Subs: 1041  |  Binds: 21</a:t>
+                        <a:t>Fleet Subs: 1047  |  Binds: 20</a:t>
                       </a:r>
                     </a:p>
                   </a:txBody>
@@ -3690,7 +3690,7 @@
                         <a:rPr sz="900">
                           <a:latin typeface="Segoe UI"/>
                         </a:rPr>
-                        <a:t>Fleet Bound Premium: $1,895,457.44</a:t>
+                        <a:t>Fleet Bound Premium: $1,906,604.21</a:t>
                       </a:r>
                     </a:p>
                   </a:txBody>
@@ -3727,7 +3727,7 @@
                         <a:rPr sz="900">
                           <a:latin typeface="Segoe UI"/>
                         </a:rPr>
-                        <a:t>Fleet Book %: 49.9%</a:t>
+                        <a:t>Fleet Book %: 49.8%</a:t>
                       </a:r>
                     </a:p>
                   </a:txBody>
@@ -3766,7 +3766,7 @@
                         <a:rPr sz="900">
                           <a:latin typeface="Segoe UI"/>
                         </a:rPr>
-                        <a:t>Non-Fleet Subs: 5166  |  Binds: 92</a:t>
+                        <a:t>Non-Fleet Subs: 5204  |  Binds: 89</a:t>
                       </a:r>
                     </a:p>
                   </a:txBody>
@@ -3803,7 +3803,7 @@
                         <a:rPr sz="900">
                           <a:latin typeface="Segoe UI"/>
                         </a:rPr>
-                        <a:t>Non-Fleet Bound Premium: $1,906,611.65</a:t>
+                        <a:t>Non-Fleet Bound Premium: $1,922,170.75</a:t>
                       </a:r>
                     </a:p>
                   </a:txBody>
@@ -3840,7 +3840,7 @@
                         <a:rPr sz="900">
                           <a:latin typeface="Segoe UI"/>
                         </a:rPr>
-                        <a:t>Non-Fleet Book %: 50.1%</a:t>
+                        <a:t>Non-Fleet Book %: 50.2%</a:t>
                       </a:r>
                     </a:p>
                   </a:txBody>
@@ -4428,7 +4428,7 @@
                           </a:solidFill>
                           <a:latin typeface="Segoe UI"/>
                         </a:rPr>
-                        <a:t>874</a:t>
+                        <a:t>920</a:t>
                       </a:r>
                     </a:p>
                   </a:txBody>
@@ -4707,7 +4707,7 @@
                           </a:solidFill>
                           <a:latin typeface="Segoe UI"/>
                         </a:rPr>
-                        <a:t>3.2%</a:t>
+                        <a:t>2.9%</a:t>
                       </a:r>
                     </a:p>
                   </a:txBody>
@@ -4747,7 +4747,7 @@
                         <a:rPr sz="800">
                           <a:latin typeface="Segoe UI"/>
                         </a:rPr>
-                        <a:t>5.6%</a:t>
+                        <a:t>5.5%</a:t>
                       </a:r>
                     </a:p>
                   </a:txBody>
@@ -4983,7 +4983,7 @@
                           </a:solidFill>
                           <a:latin typeface="Segoe UI"/>
                         </a:rPr>
-                        <a:t>28</a:t>
+                        <a:t>27</a:t>
                       </a:r>
                     </a:p>
                   </a:txBody>
@@ -5020,7 +5020,7 @@
                         <a:rPr sz="800">
                           <a:latin typeface="Segoe UI"/>
                         </a:rPr>
-                        <a:t>88</a:t>
+                        <a:t>87</a:t>
                       </a:r>
                     </a:p>
                   </a:txBody>
@@ -5262,7 +5262,7 @@
                           </a:solidFill>
                           <a:latin typeface="Segoe UI"/>
                         </a:rPr>
-                        <a:t>$592.3K</a:t>
+                        <a:t>$619.0K</a:t>
                       </a:r>
                     </a:p>
                   </a:txBody>

--- a/generated/Tier 1 Broker Scorecards/Reliance Partners, LLC_Broker_Scorecard.pptx
+++ b/generated/Tier 1 Broker Scorecards/Reliance Partners, LLC_Broker_Scorecard.pptx
@@ -3394,7 +3394,7 @@
                         <a:rPr sz="900">
                           <a:latin typeface="Segoe UI"/>
                         </a:rPr>
-                        <a:t>Tier 1  |  1.74% / 15.00%</a:t>
+                        <a:t>Tier 1  |  1.73% / 15.00%</a:t>
                       </a:r>
                     </a:p>
                   </a:txBody>
@@ -3653,7 +3653,7 @@
                         <a:rPr sz="900">
                           <a:latin typeface="Segoe UI"/>
                         </a:rPr>
-                        <a:t>Fleet Subs: 1047  |  Binds: 20</a:t>
+                        <a:t>Fleet Subs: 1048  |  Binds: 20</a:t>
                       </a:r>
                     </a:p>
                   </a:txBody>
@@ -3690,7 +3690,7 @@
                         <a:rPr sz="900">
                           <a:latin typeface="Segoe UI"/>
                         </a:rPr>
-                        <a:t>Fleet Bound Premium: $1,906,604.21</a:t>
+                        <a:t>Fleet Bound Premium: $1,932,363.25</a:t>
                       </a:r>
                     </a:p>
                   </a:txBody>
@@ -3727,7 +3727,7 @@
                         <a:rPr sz="900">
                           <a:latin typeface="Segoe UI"/>
                         </a:rPr>
-                        <a:t>Fleet Book %: 49.8%</a:t>
+                        <a:t>Fleet Book %: 50.5%</a:t>
                       </a:r>
                     </a:p>
                   </a:txBody>
@@ -3766,7 +3766,7 @@
                         <a:rPr sz="900">
                           <a:latin typeface="Segoe UI"/>
                         </a:rPr>
-                        <a:t>Non-Fleet Subs: 5204  |  Binds: 89</a:t>
+                        <a:t>Non-Fleet Subs: 5205  |  Binds: 88</a:t>
                       </a:r>
                     </a:p>
                   </a:txBody>
@@ -3803,7 +3803,7 @@
                         <a:rPr sz="900">
                           <a:latin typeface="Segoe UI"/>
                         </a:rPr>
-                        <a:t>Non-Fleet Bound Premium: $1,922,170.75</a:t>
+                        <a:t>Non-Fleet Bound Premium: $1,896,411.71</a:t>
                       </a:r>
                     </a:p>
                   </a:txBody>
@@ -3840,7 +3840,7 @@
                         <a:rPr sz="900">
                           <a:latin typeface="Segoe UI"/>
                         </a:rPr>
-                        <a:t>Non-Fleet Book %: 50.2%</a:t>
+                        <a:t>Non-Fleet Book %: 49.5%</a:t>
                       </a:r>
                     </a:p>
                   </a:txBody>
@@ -4428,7 +4428,7 @@
                           </a:solidFill>
                           <a:latin typeface="Segoe UI"/>
                         </a:rPr>
-                        <a:t>920</a:t>
+                        <a:t>922</a:t>
                       </a:r>
                     </a:p>
                   </a:txBody>
@@ -4664,7 +4664,7 @@
                         <a:rPr sz="800">
                           <a:latin typeface="Segoe UI"/>
                         </a:rPr>
-                        <a:t>5.0%</a:t>
+                        <a:t>4.9%</a:t>
                       </a:r>
                     </a:p>
                   </a:txBody>
@@ -4747,7 +4747,7 @@
                         <a:rPr sz="800">
                           <a:latin typeface="Segoe UI"/>
                         </a:rPr>
-                        <a:t>5.5%</a:t>
+                        <a:t>5.6%</a:t>
                       </a:r>
                     </a:p>
                   </a:txBody>
@@ -4943,7 +4943,7 @@
                         <a:rPr sz="800">
                           <a:latin typeface="Segoe UI"/>
                         </a:rPr>
-                        <a:t>73</a:t>
+                        <a:t>72</a:t>
                       </a:r>
                     </a:p>
                   </a:txBody>
@@ -5020,7 +5020,7 @@
                         <a:rPr sz="800">
                           <a:latin typeface="Segoe UI"/>
                         </a:rPr>
-                        <a:t>87</a:t>
+                        <a:t>88</a:t>
                       </a:r>
                     </a:p>
                   </a:txBody>

--- a/generated/Tier 1 Broker Scorecards/Reliance Partners, LLC_Broker_Scorecard.pptx
+++ b/generated/Tier 1 Broker Scorecards/Reliance Partners, LLC_Broker_Scorecard.pptx
@@ -3394,7 +3394,7 @@
                         <a:rPr sz="900">
                           <a:latin typeface="Segoe UI"/>
                         </a:rPr>
-                        <a:t>Tier 1  |  1.73% / 15.00%</a:t>
+                        <a:t>Tier 1  |  1.74% / 15.00%</a:t>
                       </a:r>
                     </a:p>
                   </a:txBody>
@@ -3690,7 +3690,7 @@
                         <a:rPr sz="900">
                           <a:latin typeface="Segoe UI"/>
                         </a:rPr>
-                        <a:t>Fleet Bound Premium: $1,932,363.25</a:t>
+                        <a:t>Fleet Bound Premium: $1,875,667.08</a:t>
                       </a:r>
                     </a:p>
                   </a:txBody>
@@ -3727,7 +3727,7 @@
                         <a:rPr sz="900">
                           <a:latin typeface="Segoe UI"/>
                         </a:rPr>
-                        <a:t>Fleet Book %: 50.5%</a:t>
+                        <a:t>Fleet Book %: 49.0%</a:t>
                       </a:r>
                     </a:p>
                   </a:txBody>
@@ -3766,7 +3766,7 @@
                         <a:rPr sz="900">
                           <a:latin typeface="Segoe UI"/>
                         </a:rPr>
-                        <a:t>Non-Fleet Subs: 5205  |  Binds: 88</a:t>
+                        <a:t>Non-Fleet Subs: 5208  |  Binds: 89</a:t>
                       </a:r>
                     </a:p>
                   </a:txBody>
@@ -3803,7 +3803,7 @@
                         <a:rPr sz="900">
                           <a:latin typeface="Segoe UI"/>
                         </a:rPr>
-                        <a:t>Non-Fleet Bound Premium: $1,896,411.71</a:t>
+                        <a:t>Non-Fleet Bound Premium: $1,953,107.88</a:t>
                       </a:r>
                     </a:p>
                   </a:txBody>
@@ -3840,7 +3840,7 @@
                         <a:rPr sz="900">
                           <a:latin typeface="Segoe UI"/>
                         </a:rPr>
-                        <a:t>Non-Fleet Book %: 49.5%</a:t>
+                        <a:t>Non-Fleet Book %: 51.0%</a:t>
                       </a:r>
                     </a:p>
                   </a:txBody>
@@ -4428,7 +4428,7 @@
                           </a:solidFill>
                           <a:latin typeface="Segoe UI"/>
                         </a:rPr>
-                        <a:t>922</a:t>
+                        <a:t>925</a:t>
                       </a:r>
                     </a:p>
                   </a:txBody>

--- a/generated/Tier 1 Broker Scorecards/Reliance Partners, LLC_Broker_Scorecard.pptx
+++ b/generated/Tier 1 Broker Scorecards/Reliance Partners, LLC_Broker_Scorecard.pptx
@@ -3394,7 +3394,7 @@
                         <a:rPr sz="900">
                           <a:latin typeface="Segoe UI"/>
                         </a:rPr>
-                        <a:t>Tier 1  |  1.74% / 15.00%</a:t>
+                        <a:t>Tier 1  |  1.73% / 15.00%</a:t>
                       </a:r>
                     </a:p>
                   </a:txBody>
@@ -3653,7 +3653,7 @@
                         <a:rPr sz="900">
                           <a:latin typeface="Segoe UI"/>
                         </a:rPr>
-                        <a:t>Fleet Subs: 1048  |  Binds: 20</a:t>
+                        <a:t>Fleet Subs: 1047  |  Binds: 20</a:t>
                       </a:r>
                     </a:p>
                   </a:txBody>
@@ -3690,7 +3690,7 @@
                         <a:rPr sz="900">
                           <a:latin typeface="Segoe UI"/>
                         </a:rPr>
-                        <a:t>Fleet Bound Premium: $1,875,667.08</a:t>
+                        <a:t>Fleet Bound Premium: $1,932,363.25</a:t>
                       </a:r>
                     </a:p>
                   </a:txBody>
@@ -3727,7 +3727,7 @@
                         <a:rPr sz="900">
                           <a:latin typeface="Segoe UI"/>
                         </a:rPr>
-                        <a:t>Fleet Book %: 49.0%</a:t>
+                        <a:t>Fleet Book %: 50.5%</a:t>
                       </a:r>
                     </a:p>
                   </a:txBody>
@@ -3766,7 +3766,7 @@
                         <a:rPr sz="900">
                           <a:latin typeface="Segoe UI"/>
                         </a:rPr>
-                        <a:t>Non-Fleet Subs: 5208  |  Binds: 89</a:t>
+                        <a:t>Non-Fleet Subs: 5208  |  Binds: 88</a:t>
                       </a:r>
                     </a:p>
                   </a:txBody>
@@ -3803,7 +3803,7 @@
                         <a:rPr sz="900">
                           <a:latin typeface="Segoe UI"/>
                         </a:rPr>
-                        <a:t>Non-Fleet Bound Premium: $1,953,107.88</a:t>
+                        <a:t>Non-Fleet Bound Premium: $1,896,411.71</a:t>
                       </a:r>
                     </a:p>
                   </a:txBody>
@@ -3840,7 +3840,7 @@
                         <a:rPr sz="900">
                           <a:latin typeface="Segoe UI"/>
                         </a:rPr>
-                        <a:t>Non-Fleet Book %: 51.0%</a:t>
+                        <a:t>Non-Fleet Book %: 49.5%</a:t>
                       </a:r>
                     </a:p>
                   </a:txBody>
@@ -4428,7 +4428,7 @@
                           </a:solidFill>
                           <a:latin typeface="Segoe UI"/>
                         </a:rPr>
-                        <a:t>925</a:t>
+                        <a:t>924</a:t>
                       </a:r>
                     </a:p>
                   </a:txBody>
@@ -4581,7 +4581,7 @@
                         <a:rPr sz="800">
                           <a:latin typeface="Segoe UI"/>
                         </a:rPr>
-                        <a:t>5.5%</a:t>
+                        <a:t>5.4%</a:t>
                       </a:r>
                     </a:p>
                   </a:txBody>
@@ -4664,7 +4664,7 @@
                         <a:rPr sz="800">
                           <a:latin typeface="Segoe UI"/>
                         </a:rPr>
-                        <a:t>4.9%</a:t>
+                        <a:t>5.0%</a:t>
                       </a:r>
                     </a:p>
                   </a:txBody>
@@ -4866,7 +4866,7 @@
                         <a:rPr sz="800">
                           <a:latin typeface="Segoe UI"/>
                         </a:rPr>
-                        <a:t>85</a:t>
+                        <a:t>84</a:t>
                       </a:r>
                     </a:p>
                   </a:txBody>
@@ -4943,7 +4943,7 @@
                         <a:rPr sz="800">
                           <a:latin typeface="Segoe UI"/>
                         </a:rPr>
-                        <a:t>72</a:t>
+                        <a:t>73</a:t>
                       </a:r>
                     </a:p>
                   </a:txBody>

--- a/generated/Tier 1 Broker Scorecards/Reliance Partners, LLC_Broker_Scorecard.pptx
+++ b/generated/Tier 1 Broker Scorecards/Reliance Partners, LLC_Broker_Scorecard.pptx
@@ -3357,7 +3357,7 @@
                         <a:rPr sz="800">
                           <a:latin typeface="Segoe UI"/>
                         </a:rPr>
-                        <a:t>$11,296,745.54 / $12,142,828.01 / $3,828,774.96</a:t>
+                        <a:t>$11,296,745.54 / $12,203,416.33 / $3,889,363.28</a:t>
                       </a:r>
                     </a:p>
                   </a:txBody>
@@ -3394,7 +3394,7 @@
                         <a:rPr sz="900">
                           <a:latin typeface="Segoe UI"/>
                         </a:rPr>
-                        <a:t>Tier 1  |  1.73% / 15.00%</a:t>
+                        <a:t>Tier 1  |  1.81% / 15.00%</a:t>
                       </a:r>
                     </a:p>
                   </a:txBody>
@@ -3431,7 +3431,7 @@
                         <a:rPr sz="900">
                           <a:latin typeface="Segoe UI"/>
                         </a:rPr>
-                        <a:t>$15,815,443.76  (24.2% achieved)</a:t>
+                        <a:t>$15,815,443.76  (24.6% achieved)</a:t>
                       </a:r>
                     </a:p>
                   </a:txBody>
@@ -3653,7 +3653,7 @@
                         <a:rPr sz="900">
                           <a:latin typeface="Segoe UI"/>
                         </a:rPr>
-                        <a:t>Fleet Subs: 1047  |  Binds: 20</a:t>
+                        <a:t>Fleet Subs: 1054  |  Binds: 21</a:t>
                       </a:r>
                     </a:p>
                   </a:txBody>
@@ -3690,7 +3690,7 @@
                         <a:rPr sz="900">
                           <a:latin typeface="Segoe UI"/>
                         </a:rPr>
-                        <a:t>Fleet Bound Premium: $1,932,363.25</a:t>
+                        <a:t>Fleet Bound Premium: $1,891,532.25</a:t>
                       </a:r>
                     </a:p>
                   </a:txBody>
@@ -3727,7 +3727,7 @@
                         <a:rPr sz="900">
                           <a:latin typeface="Segoe UI"/>
                         </a:rPr>
-                        <a:t>Fleet Book %: 50.5%</a:t>
+                        <a:t>Fleet Book %: 48.6%</a:t>
                       </a:r>
                     </a:p>
                   </a:txBody>
@@ -3766,7 +3766,7 @@
                         <a:rPr sz="900">
                           <a:latin typeface="Segoe UI"/>
                         </a:rPr>
-                        <a:t>Non-Fleet Subs: 5208  |  Binds: 88</a:t>
+                        <a:t>Non-Fleet Subs: 5230  |  Binds: 93</a:t>
                       </a:r>
                     </a:p>
                   </a:txBody>
@@ -3803,7 +3803,7 @@
                         <a:rPr sz="900">
                           <a:latin typeface="Segoe UI"/>
                         </a:rPr>
-                        <a:t>Non-Fleet Bound Premium: $1,896,411.71</a:t>
+                        <a:t>Non-Fleet Bound Premium: $1,997,831.03</a:t>
                       </a:r>
                     </a:p>
                   </a:txBody>
@@ -3840,7 +3840,7 @@
                         <a:rPr sz="900">
                           <a:latin typeface="Segoe UI"/>
                         </a:rPr>
-                        <a:t>Non-Fleet Book %: 49.5%</a:t>
+                        <a:t>Non-Fleet Book %: 51.4%</a:t>
                       </a:r>
                     </a:p>
                   </a:txBody>
@@ -4428,7 +4428,7 @@
                           </a:solidFill>
                           <a:latin typeface="Segoe UI"/>
                         </a:rPr>
-                        <a:t>924</a:t>
+                        <a:t>954</a:t>
                       </a:r>
                     </a:p>
                   </a:txBody>
@@ -4465,7 +4465,7 @@
                         <a:rPr sz="800">
                           <a:latin typeface="Segoe UI"/>
                         </a:rPr>
-                        <a:t>1568</a:t>
+                        <a:t>1569</a:t>
                       </a:r>
                     </a:p>
                   </a:txBody>
@@ -4664,7 +4664,7 @@
                         <a:rPr sz="800">
                           <a:latin typeface="Segoe UI"/>
                         </a:rPr>
-                        <a:t>5.0%</a:t>
+                        <a:t>4.9%</a:t>
                       </a:r>
                     </a:p>
                   </a:txBody>
@@ -4707,7 +4707,7 @@
                           </a:solidFill>
                           <a:latin typeface="Segoe UI"/>
                         </a:rPr>
-                        <a:t>2.9%</a:t>
+                        <a:t>3.4%</a:t>
                       </a:r>
                     </a:p>
                   </a:txBody>
@@ -4747,7 +4747,7 @@
                         <a:rPr sz="800">
                           <a:latin typeface="Segoe UI"/>
                         </a:rPr>
-                        <a:t>5.6%</a:t>
+                        <a:t>5.5%</a:t>
                       </a:r>
                     </a:p>
                   </a:txBody>
@@ -4943,7 +4943,7 @@
                         <a:rPr sz="800">
                           <a:latin typeface="Segoe UI"/>
                         </a:rPr>
-                        <a:t>73</a:t>
+                        <a:t>72</a:t>
                       </a:r>
                     </a:p>
                   </a:txBody>
@@ -4983,7 +4983,7 @@
                           </a:solidFill>
                           <a:latin typeface="Segoe UI"/>
                         </a:rPr>
-                        <a:t>27</a:t>
+                        <a:t>32</a:t>
                       </a:r>
                     </a:p>
                   </a:txBody>
@@ -5020,7 +5020,7 @@
                         <a:rPr sz="800">
                           <a:latin typeface="Segoe UI"/>
                         </a:rPr>
-                        <a:t>88</a:t>
+                        <a:t>87</a:t>
                       </a:r>
                     </a:p>
                   </a:txBody>
@@ -5262,7 +5262,7 @@
                           </a:solidFill>
                           <a:latin typeface="Segoe UI"/>
                         </a:rPr>
-                        <a:t>$619.0K</a:t>
+                        <a:t>$679.6K</a:t>
                       </a:r>
                     </a:p>
                   </a:txBody>

--- a/generated/Tier 1 Broker Scorecards/Reliance Partners, LLC_Broker_Scorecard.pptx
+++ b/generated/Tier 1 Broker Scorecards/Reliance Partners, LLC_Broker_Scorecard.pptx
@@ -3357,7 +3357,7 @@
                         <a:rPr sz="800">
                           <a:latin typeface="Segoe UI"/>
                         </a:rPr>
-                        <a:t>$11,296,745.54 / $12,203,416.33 / $3,889,363.28</a:t>
+                        <a:t>$11,296,745.54 / $12,212,654.64 / $3,898,601.59</a:t>
                       </a:r>
                     </a:p>
                   </a:txBody>
@@ -3394,7 +3394,7 @@
                         <a:rPr sz="900">
                           <a:latin typeface="Segoe UI"/>
                         </a:rPr>
-                        <a:t>Tier 1  |  1.81% / 15.00%</a:t>
+                        <a:t>Tier 1  |  1.83% / 15.00%</a:t>
                       </a:r>
                     </a:p>
                   </a:txBody>
@@ -3431,7 +3431,7 @@
                         <a:rPr sz="900">
                           <a:latin typeface="Segoe UI"/>
                         </a:rPr>
-                        <a:t>$15,815,443.76  (24.6% achieved)</a:t>
+                        <a:t>$15,815,443.76  (24.7% achieved)</a:t>
                       </a:r>
                     </a:p>
                   </a:txBody>
@@ -3653,7 +3653,7 @@
                         <a:rPr sz="900">
                           <a:latin typeface="Segoe UI"/>
                         </a:rPr>
-                        <a:t>Fleet Subs: 1054  |  Binds: 21</a:t>
+                        <a:t>Fleet Subs: 1065  |  Binds: 21</a:t>
                       </a:r>
                     </a:p>
                   </a:txBody>
@@ -3690,7 +3690,7 @@
                         <a:rPr sz="900">
                           <a:latin typeface="Segoe UI"/>
                         </a:rPr>
-                        <a:t>Fleet Bound Premium: $1,891,532.25</a:t>
+                        <a:t>Fleet Bound Premium: $1,915,204.32</a:t>
                       </a:r>
                     </a:p>
                   </a:txBody>
@@ -3727,7 +3727,7 @@
                         <a:rPr sz="900">
                           <a:latin typeface="Segoe UI"/>
                         </a:rPr>
-                        <a:t>Fleet Book %: 48.6%</a:t>
+                        <a:t>Fleet Book %: 49.1%</a:t>
                       </a:r>
                     </a:p>
                   </a:txBody>
@@ -3766,7 +3766,7 @@
                         <a:rPr sz="900">
                           <a:latin typeface="Segoe UI"/>
                         </a:rPr>
-                        <a:t>Non-Fleet Subs: 5230  |  Binds: 93</a:t>
+                        <a:t>Non-Fleet Subs: 5274  |  Binds: 95</a:t>
                       </a:r>
                     </a:p>
                   </a:txBody>
@@ -3803,7 +3803,7 @@
                         <a:rPr sz="900">
                           <a:latin typeface="Segoe UI"/>
                         </a:rPr>
-                        <a:t>Non-Fleet Bound Premium: $1,997,831.03</a:t>
+                        <a:t>Non-Fleet Bound Premium: $1,983,397.27</a:t>
                       </a:r>
                     </a:p>
                   </a:txBody>
@@ -3840,7 +3840,7 @@
                         <a:rPr sz="900">
                           <a:latin typeface="Segoe UI"/>
                         </a:rPr>
-                        <a:t>Non-Fleet Book %: 51.4%</a:t>
+                        <a:t>Non-Fleet Book %: 50.9%</a:t>
                       </a:r>
                     </a:p>
                   </a:txBody>
@@ -4428,7 +4428,7 @@
                           </a:solidFill>
                           <a:latin typeface="Segoe UI"/>
                         </a:rPr>
-                        <a:t>954</a:t>
+                        <a:t>1014</a:t>
                       </a:r>
                     </a:p>
                   </a:txBody>
@@ -4664,7 +4664,7 @@
                         <a:rPr sz="800">
                           <a:latin typeface="Segoe UI"/>
                         </a:rPr>
-                        <a:t>4.9%</a:t>
+                        <a:t>5.0%</a:t>
                       </a:r>
                     </a:p>
                   </a:txBody>
@@ -4707,7 +4707,7 @@
                           </a:solidFill>
                           <a:latin typeface="Segoe UI"/>
                         </a:rPr>
-                        <a:t>3.4%</a:t>
+                        <a:t>3.3%</a:t>
                       </a:r>
                     </a:p>
                   </a:txBody>
@@ -4747,7 +4747,7 @@
                         <a:rPr sz="800">
                           <a:latin typeface="Segoe UI"/>
                         </a:rPr>
-                        <a:t>5.5%</a:t>
+                        <a:t>5.7%</a:t>
                       </a:r>
                     </a:p>
                   </a:txBody>
@@ -4943,7 +4943,7 @@
                         <a:rPr sz="800">
                           <a:latin typeface="Segoe UI"/>
                         </a:rPr>
-                        <a:t>72</a:t>
+                        <a:t>73</a:t>
                       </a:r>
                     </a:p>
                   </a:txBody>
@@ -4983,7 +4983,7 @@
                           </a:solidFill>
                           <a:latin typeface="Segoe UI"/>
                         </a:rPr>
-                        <a:t>32</a:t>
+                        <a:t>33</a:t>
                       </a:r>
                     </a:p>
                   </a:txBody>
@@ -5020,7 +5020,7 @@
                         <a:rPr sz="800">
                           <a:latin typeface="Segoe UI"/>
                         </a:rPr>
-                        <a:t>87</a:t>
+                        <a:t>90</a:t>
                       </a:r>
                     </a:p>
                   </a:txBody>
@@ -5262,7 +5262,7 @@
                           </a:solidFill>
                           <a:latin typeface="Segoe UI"/>
                         </a:rPr>
-                        <a:t>$679.6K</a:t>
+                        <a:t>$688.8K</a:t>
                       </a:r>
                     </a:p>
                   </a:txBody>

--- a/generated/Tier 1 Broker Scorecards/Reliance Partners, LLC_Broker_Scorecard.pptx
+++ b/generated/Tier 1 Broker Scorecards/Reliance Partners, LLC_Broker_Scorecard.pptx
@@ -3357,7 +3357,7 @@
                         <a:rPr sz="800">
                           <a:latin typeface="Segoe UI"/>
                         </a:rPr>
-                        <a:t>$11,296,745.54 / $12,212,654.64 / $3,898,601.59</a:t>
+                        <a:t>$11,296,745.54 / $12,517,098.19 / $4,203,045.14</a:t>
                       </a:r>
                     </a:p>
                   </a:txBody>
@@ -3394,7 +3394,7 @@
                         <a:rPr sz="900">
                           <a:latin typeface="Segoe UI"/>
                         </a:rPr>
-                        <a:t>Tier 1  |  1.83% / 15.00%</a:t>
+                        <a:t>Tier 1  |  1.87% / 15.00%</a:t>
                       </a:r>
                     </a:p>
                   </a:txBody>
@@ -3431,7 +3431,7 @@
                         <a:rPr sz="900">
                           <a:latin typeface="Segoe UI"/>
                         </a:rPr>
-                        <a:t>$15,815,443.76  (24.7% achieved)</a:t>
+                        <a:t>$15,815,443.76  (26.6% achieved)</a:t>
                       </a:r>
                     </a:p>
                   </a:txBody>
@@ -3653,7 +3653,7 @@
                         <a:rPr sz="900">
                           <a:latin typeface="Segoe UI"/>
                         </a:rPr>
-                        <a:t>Fleet Subs: 1065  |  Binds: 21</a:t>
+                        <a:t>Fleet Subs: 1072  |  Binds: 22</a:t>
                       </a:r>
                     </a:p>
                   </a:txBody>
@@ -3690,7 +3690,7 @@
                         <a:rPr sz="900">
                           <a:latin typeface="Segoe UI"/>
                         </a:rPr>
-                        <a:t>Fleet Bound Premium: $1,915,204.32</a:t>
+                        <a:t>Fleet Bound Premium: $2,091,504.22</a:t>
                       </a:r>
                     </a:p>
                   </a:txBody>
@@ -3727,7 +3727,7 @@
                         <a:rPr sz="900">
                           <a:latin typeface="Segoe UI"/>
                         </a:rPr>
-                        <a:t>Fleet Book %: 49.1%</a:t>
+                        <a:t>Fleet Book %: 49.8%</a:t>
                       </a:r>
                     </a:p>
                   </a:txBody>
@@ -3766,7 +3766,7 @@
                         <a:rPr sz="900">
                           <a:latin typeface="Segoe UI"/>
                         </a:rPr>
-                        <a:t>Non-Fleet Subs: 5274  |  Binds: 95</a:t>
+                        <a:t>Non-Fleet Subs: 5303  |  Binds: 97</a:t>
                       </a:r>
                     </a:p>
                   </a:txBody>
@@ -3803,7 +3803,7 @@
                         <a:rPr sz="900">
                           <a:latin typeface="Segoe UI"/>
                         </a:rPr>
-                        <a:t>Non-Fleet Bound Premium: $1,983,397.27</a:t>
+                        <a:t>Non-Fleet Bound Premium: $2,111,540.92</a:t>
                       </a:r>
                     </a:p>
                   </a:txBody>
@@ -3840,7 +3840,7 @@
                         <a:rPr sz="900">
                           <a:latin typeface="Segoe UI"/>
                         </a:rPr>
-                        <a:t>Non-Fleet Book %: 50.9%</a:t>
+                        <a:t>Non-Fleet Book %: 50.2%</a:t>
                       </a:r>
                     </a:p>
                   </a:txBody>
@@ -4428,7 +4428,7 @@
                           </a:solidFill>
                           <a:latin typeface="Segoe UI"/>
                         </a:rPr>
-                        <a:t>1014</a:t>
+                        <a:t>1053</a:t>
                       </a:r>
                     </a:p>
                   </a:txBody>
@@ -4581,7 +4581,7 @@
                         <a:rPr sz="800">
                           <a:latin typeface="Segoe UI"/>
                         </a:rPr>
-                        <a:t>5.4%</a:t>
+                        <a:t>5.5%</a:t>
                       </a:r>
                     </a:p>
                   </a:txBody>
@@ -4707,7 +4707,7 @@
                           </a:solidFill>
                           <a:latin typeface="Segoe UI"/>
                         </a:rPr>
-                        <a:t>3.3%</a:t>
+                        <a:t>3.4%</a:t>
                       </a:r>
                     </a:p>
                   </a:txBody>
@@ -4866,7 +4866,7 @@
                         <a:rPr sz="800">
                           <a:latin typeface="Segoe UI"/>
                         </a:rPr>
-                        <a:t>84</a:t>
+                        <a:t>85</a:t>
                       </a:r>
                     </a:p>
                   </a:txBody>
@@ -4906,7 +4906,7 @@
                           </a:solidFill>
                           <a:latin typeface="Segoe UI"/>
                         </a:rPr>
-                        <a:t>46</a:t>
+                        <a:t>47</a:t>
                       </a:r>
                     </a:p>
                   </a:txBody>
@@ -4983,7 +4983,7 @@
                           </a:solidFill>
                           <a:latin typeface="Segoe UI"/>
                         </a:rPr>
-                        <a:t>33</a:t>
+                        <a:t>36</a:t>
                       </a:r>
                     </a:p>
                   </a:txBody>
@@ -5020,7 +5020,7 @@
                         <a:rPr sz="800">
                           <a:latin typeface="Segoe UI"/>
                         </a:rPr>
-                        <a:t>90</a:t>
+                        <a:t>89</a:t>
                       </a:r>
                     </a:p>
                   </a:txBody>
@@ -5262,7 +5262,7 @@
                           </a:solidFill>
                           <a:latin typeface="Segoe UI"/>
                         </a:rPr>
-                        <a:t>$688.8K</a:t>
+                        <a:t>$993.3K</a:t>
                       </a:r>
                     </a:p>
                   </a:txBody>

--- a/generated/Tier 1 Broker Scorecards/Reliance Partners, LLC_Broker_Scorecard.pptx
+++ b/generated/Tier 1 Broker Scorecards/Reliance Partners, LLC_Broker_Scorecard.pptx
@@ -3357,7 +3357,7 @@
                         <a:rPr sz="800">
                           <a:latin typeface="Segoe UI"/>
                         </a:rPr>
-                        <a:t>$11,296,745.54 / $12,517,098.19 / $4,203,045.14</a:t>
+                        <a:t>$11,296,745.54 / $12,528,743.32 / $4,214,690.27</a:t>
                       </a:r>
                     </a:p>
                   </a:txBody>
@@ -3394,7 +3394,7 @@
                         <a:rPr sz="900">
                           <a:latin typeface="Segoe UI"/>
                         </a:rPr>
-                        <a:t>Tier 1  |  1.87% / 15.00%</a:t>
+                        <a:t>Tier 1  |  1.84% / 15.00%</a:t>
                       </a:r>
                     </a:p>
                   </a:txBody>
@@ -3653,7 +3653,7 @@
                         <a:rPr sz="900">
                           <a:latin typeface="Segoe UI"/>
                         </a:rPr>
-                        <a:t>Fleet Subs: 1072  |  Binds: 22</a:t>
+                        <a:t>Fleet Subs: 1078  |  Binds: 21</a:t>
                       </a:r>
                     </a:p>
                   </a:txBody>
@@ -3690,7 +3690,7 @@
                         <a:rPr sz="900">
                           <a:latin typeface="Segoe UI"/>
                         </a:rPr>
-                        <a:t>Fleet Bound Premium: $2,091,504.22</a:t>
+                        <a:t>Fleet Bound Premium: $2,007,615.77</a:t>
                       </a:r>
                     </a:p>
                   </a:txBody>
@@ -3727,7 +3727,7 @@
                         <a:rPr sz="900">
                           <a:latin typeface="Segoe UI"/>
                         </a:rPr>
-                        <a:t>Fleet Book %: 49.8%</a:t>
+                        <a:t>Fleet Book %: 47.6%</a:t>
                       </a:r>
                     </a:p>
                   </a:txBody>
@@ -3766,7 +3766,7 @@
                         <a:rPr sz="900">
                           <a:latin typeface="Segoe UI"/>
                         </a:rPr>
-                        <a:t>Non-Fleet Subs: 5303  |  Binds: 97</a:t>
+                        <a:t>Non-Fleet Subs: 5329  |  Binds: 97</a:t>
                       </a:r>
                     </a:p>
                   </a:txBody>
@@ -3803,7 +3803,7 @@
                         <a:rPr sz="900">
                           <a:latin typeface="Segoe UI"/>
                         </a:rPr>
-                        <a:t>Non-Fleet Bound Premium: $2,111,540.92</a:t>
+                        <a:t>Non-Fleet Bound Premium: $2,207,074.50</a:t>
                       </a:r>
                     </a:p>
                   </a:txBody>
@@ -3840,7 +3840,7 @@
                         <a:rPr sz="900">
                           <a:latin typeface="Segoe UI"/>
                         </a:rPr>
-                        <a:t>Non-Fleet Book %: 50.2%</a:t>
+                        <a:t>Non-Fleet Book %: 52.4%</a:t>
                       </a:r>
                     </a:p>
                   </a:txBody>
@@ -4428,7 +4428,7 @@
                           </a:solidFill>
                           <a:latin typeface="Segoe UI"/>
                         </a:rPr>
-                        <a:t>1053</a:t>
+                        <a:t>1089</a:t>
                       </a:r>
                     </a:p>
                   </a:txBody>
@@ -4465,7 +4465,7 @@
                         <a:rPr sz="800">
                           <a:latin typeface="Segoe UI"/>
                         </a:rPr>
-                        <a:t>1569</a:t>
+                        <a:t>1568</a:t>
                       </a:r>
                     </a:p>
                   </a:txBody>
@@ -4581,7 +4581,7 @@
                         <a:rPr sz="800">
                           <a:latin typeface="Segoe UI"/>
                         </a:rPr>
-                        <a:t>5.5%</a:t>
+                        <a:t>5.4%</a:t>
                       </a:r>
                     </a:p>
                   </a:txBody>
@@ -4707,7 +4707,7 @@
                           </a:solidFill>
                           <a:latin typeface="Segoe UI"/>
                         </a:rPr>
-                        <a:t>3.4%</a:t>
+                        <a:t>3.6%</a:t>
                       </a:r>
                     </a:p>
                   </a:txBody>
@@ -4747,7 +4747,7 @@
                         <a:rPr sz="800">
                           <a:latin typeface="Segoe UI"/>
                         </a:rPr>
-                        <a:t>5.7%</a:t>
+                        <a:t>5.5%</a:t>
                       </a:r>
                     </a:p>
                   </a:txBody>
@@ -4866,7 +4866,7 @@
                         <a:rPr sz="800">
                           <a:latin typeface="Segoe UI"/>
                         </a:rPr>
-                        <a:t>85</a:t>
+                        <a:t>84</a:t>
                       </a:r>
                     </a:p>
                   </a:txBody>
@@ -4983,7 +4983,7 @@
                           </a:solidFill>
                           <a:latin typeface="Segoe UI"/>
                         </a:rPr>
-                        <a:t>36</a:t>
+                        <a:t>39</a:t>
                       </a:r>
                     </a:p>
                   </a:txBody>
@@ -5020,7 +5020,7 @@
                         <a:rPr sz="800">
                           <a:latin typeface="Segoe UI"/>
                         </a:rPr>
-                        <a:t>89</a:t>
+                        <a:t>87</a:t>
                       </a:r>
                     </a:p>
                   </a:txBody>
@@ -5262,7 +5262,7 @@
                           </a:solidFill>
                           <a:latin typeface="Segoe UI"/>
                         </a:rPr>
-                        <a:t>$993.3K</a:t>
+                        <a:t>$1.00M</a:t>
                       </a:r>
                     </a:p>
                   </a:txBody>

--- a/generated/Tier 1 Broker Scorecards/Reliance Partners, LLC_Broker_Scorecard.pptx
+++ b/generated/Tier 1 Broker Scorecards/Reliance Partners, LLC_Broker_Scorecard.pptx
@@ -3394,7 +3394,7 @@
                         <a:rPr sz="900">
                           <a:latin typeface="Segoe UI"/>
                         </a:rPr>
-                        <a:t>Tier 1  |  1.84% / 15.00%</a:t>
+                        <a:t>Tier 1  |  1.87% / 15.00%</a:t>
                       </a:r>
                     </a:p>
                   </a:txBody>
@@ -3653,7 +3653,7 @@
                         <a:rPr sz="900">
                           <a:latin typeface="Segoe UI"/>
                         </a:rPr>
-                        <a:t>Fleet Subs: 1078  |  Binds: 21</a:t>
+                        <a:t>Fleet Subs: 1081  |  Binds: 21</a:t>
                       </a:r>
                     </a:p>
                   </a:txBody>
@@ -3690,7 +3690,7 @@
                         <a:rPr sz="900">
                           <a:latin typeface="Segoe UI"/>
                         </a:rPr>
-                        <a:t>Fleet Bound Premium: $2,007,615.77</a:t>
+                        <a:t>Fleet Bound Premium: $1,952,787.18</a:t>
                       </a:r>
                     </a:p>
                   </a:txBody>
@@ -3727,7 +3727,7 @@
                         <a:rPr sz="900">
                           <a:latin typeface="Segoe UI"/>
                         </a:rPr>
-                        <a:t>Fleet Book %: 47.6%</a:t>
+                        <a:t>Fleet Book %: 46.3%</a:t>
                       </a:r>
                     </a:p>
                   </a:txBody>
@@ -3766,7 +3766,7 @@
                         <a:rPr sz="900">
                           <a:latin typeface="Segoe UI"/>
                         </a:rPr>
-                        <a:t>Non-Fleet Subs: 5329  |  Binds: 97</a:t>
+                        <a:t>Non-Fleet Subs: 5347  |  Binds: 99</a:t>
                       </a:r>
                     </a:p>
                   </a:txBody>
@@ -3803,7 +3803,7 @@
                         <a:rPr sz="900">
                           <a:latin typeface="Segoe UI"/>
                         </a:rPr>
-                        <a:t>Non-Fleet Bound Premium: $2,207,074.50</a:t>
+                        <a:t>Non-Fleet Bound Premium: $2,261,903.09</a:t>
                       </a:r>
                     </a:p>
                   </a:txBody>
@@ -3840,7 +3840,7 @@
                         <a:rPr sz="900">
                           <a:latin typeface="Segoe UI"/>
                         </a:rPr>
-                        <a:t>Non-Fleet Book %: 52.4%</a:t>
+                        <a:t>Non-Fleet Book %: 53.7%</a:t>
                       </a:r>
                     </a:p>
                   </a:txBody>
@@ -4311,7 +4311,7 @@
                         <a:rPr sz="800">
                           <a:latin typeface="Segoe UI"/>
                         </a:rPr>
-                        <a:t>1548</a:t>
+                        <a:t>1549</a:t>
                       </a:r>
                     </a:p>
                   </a:txBody>
@@ -4428,7 +4428,7 @@
                           </a:solidFill>
                           <a:latin typeface="Segoe UI"/>
                         </a:rPr>
-                        <a:t>1089</a:t>
+                        <a:t>1110</a:t>
                       </a:r>
                     </a:p>
                   </a:txBody>
@@ -4465,7 +4465,7 @@
                         <a:rPr sz="800">
                           <a:latin typeface="Segoe UI"/>
                         </a:rPr>
-                        <a:t>1568</a:t>
+                        <a:t>1569</a:t>
                       </a:r>
                     </a:p>
                   </a:txBody>
@@ -4581,7 +4581,7 @@
                         <a:rPr sz="800">
                           <a:latin typeface="Segoe UI"/>
                         </a:rPr>
-                        <a:t>5.4%</a:t>
+                        <a:t>5.5%</a:t>
                       </a:r>
                     </a:p>
                   </a:txBody>
@@ -4664,7 +4664,7 @@
                         <a:rPr sz="800">
                           <a:latin typeface="Segoe UI"/>
                         </a:rPr>
-                        <a:t>5.0%</a:t>
+                        <a:t>4.9%</a:t>
                       </a:r>
                     </a:p>
                   </a:txBody>
@@ -4707,7 +4707,7 @@
                           </a:solidFill>
                           <a:latin typeface="Segoe UI"/>
                         </a:rPr>
-                        <a:t>3.6%</a:t>
+                        <a:t>3.5%</a:t>
                       </a:r>
                     </a:p>
                   </a:txBody>
@@ -4747,7 +4747,7 @@
                         <a:rPr sz="800">
                           <a:latin typeface="Segoe UI"/>
                         </a:rPr>
-                        <a:t>5.5%</a:t>
+                        <a:t>5.6%</a:t>
                       </a:r>
                     </a:p>
                   </a:txBody>
@@ -4866,7 +4866,7 @@
                         <a:rPr sz="800">
                           <a:latin typeface="Segoe UI"/>
                         </a:rPr>
-                        <a:t>84</a:t>
+                        <a:t>85</a:t>
                       </a:r>
                     </a:p>
                   </a:txBody>
@@ -4943,7 +4943,7 @@
                         <a:rPr sz="800">
                           <a:latin typeface="Segoe UI"/>
                         </a:rPr>
-                        <a:t>73</a:t>
+                        <a:t>72</a:t>
                       </a:r>
                     </a:p>
                   </a:txBody>
@@ -5020,7 +5020,7 @@
                         <a:rPr sz="800">
                           <a:latin typeface="Segoe UI"/>
                         </a:rPr>
-                        <a:t>87</a:t>
+                        <a:t>88</a:t>
                       </a:r>
                     </a:p>
                   </a:txBody>

--- a/generated/Tier 1 Broker Scorecards/Reliance Partners, LLC_Broker_Scorecard.pptx
+++ b/generated/Tier 1 Broker Scorecards/Reliance Partners, LLC_Broker_Scorecard.pptx
@@ -3357,7 +3357,7 @@
                         <a:rPr sz="800">
                           <a:latin typeface="Segoe UI"/>
                         </a:rPr>
-                        <a:t>$11,296,745.54 / $12,528,743.32 / $4,214,690.27</a:t>
+                        <a:t>$11,296,745.54 / $11,216,159.96 / $4,214,690.27</a:t>
                       </a:r>
                     </a:p>
                   </a:txBody>
@@ -3394,7 +3394,7 @@
                         <a:rPr sz="900">
                           <a:latin typeface="Segoe UI"/>
                         </a:rPr>
-                        <a:t>Tier 1  |  1.87% / 15.00%</a:t>
+                        <a:t>Tier 1  |  1.80% / 15.00%</a:t>
                       </a:r>
                     </a:p>
                   </a:txBody>
@@ -3690,7 +3690,7 @@
                         <a:rPr sz="900">
                           <a:latin typeface="Segoe UI"/>
                         </a:rPr>
-                        <a:t>Fleet Bound Premium: $1,952,787.18</a:t>
+                        <a:t>Fleet Bound Premium: $1,994,802.58</a:t>
                       </a:r>
                     </a:p>
                   </a:txBody>
@@ -3727,7 +3727,7 @@
                         <a:rPr sz="900">
                           <a:latin typeface="Segoe UI"/>
                         </a:rPr>
-                        <a:t>Fleet Book %: 46.3%</a:t>
+                        <a:t>Fleet Book %: 47.3%</a:t>
                       </a:r>
                     </a:p>
                   </a:txBody>
@@ -3766,7 +3766,7 @@
                         <a:rPr sz="900">
                           <a:latin typeface="Segoe UI"/>
                         </a:rPr>
-                        <a:t>Non-Fleet Subs: 5347  |  Binds: 99</a:t>
+                        <a:t>Non-Fleet Subs: 5347  |  Binds: 95</a:t>
                       </a:r>
                     </a:p>
                   </a:txBody>
@@ -3803,7 +3803,7 @@
                         <a:rPr sz="900">
                           <a:latin typeface="Segoe UI"/>
                         </a:rPr>
-                        <a:t>Non-Fleet Bound Premium: $2,261,903.09</a:t>
+                        <a:t>Non-Fleet Bound Premium: $2,219,887.69</a:t>
                       </a:r>
                     </a:p>
                   </a:txBody>
@@ -3840,7 +3840,7 @@
                         <a:rPr sz="900">
                           <a:latin typeface="Segoe UI"/>
                         </a:rPr>
-                        <a:t>Non-Fleet Book %: 53.7%</a:t>
+                        <a:t>Non-Fleet Book %: 52.7%</a:t>
                       </a:r>
                     </a:p>
                   </a:txBody>
@@ -4311,7 +4311,7 @@
                         <a:rPr sz="800">
                           <a:latin typeface="Segoe UI"/>
                         </a:rPr>
-                        <a:t>1549</a:t>
+                        <a:t>1548</a:t>
                       </a:r>
                     </a:p>
                   </a:txBody>
@@ -4581,7 +4581,7 @@
                         <a:rPr sz="800">
                           <a:latin typeface="Segoe UI"/>
                         </a:rPr>
-                        <a:t>5.5%</a:t>
+                        <a:t>5.4%</a:t>
                       </a:r>
                     </a:p>
                   </a:txBody>
@@ -4707,7 +4707,7 @@
                           </a:solidFill>
                           <a:latin typeface="Segoe UI"/>
                         </a:rPr>
-                        <a:t>3.5%</a:t>
+                        <a:t>3.4%</a:t>
                       </a:r>
                     </a:p>
                   </a:txBody>
@@ -4747,7 +4747,7 @@
                         <a:rPr sz="800">
                           <a:latin typeface="Segoe UI"/>
                         </a:rPr>
-                        <a:t>5.6%</a:t>
+                        <a:t>5.7%</a:t>
                       </a:r>
                     </a:p>
                   </a:txBody>
@@ -4866,7 +4866,7 @@
                         <a:rPr sz="800">
                           <a:latin typeface="Segoe UI"/>
                         </a:rPr>
-                        <a:t>85</a:t>
+                        <a:t>84</a:t>
                       </a:r>
                     </a:p>
                   </a:txBody>
@@ -4906,7 +4906,7 @@
                           </a:solidFill>
                           <a:latin typeface="Segoe UI"/>
                         </a:rPr>
-                        <a:t>47</a:t>
+                        <a:t>46</a:t>
                       </a:r>
                     </a:p>
                   </a:txBody>
@@ -4983,7 +4983,7 @@
                           </a:solidFill>
                           <a:latin typeface="Segoe UI"/>
                         </a:rPr>
-                        <a:t>39</a:t>
+                        <a:t>38</a:t>
                       </a:r>
                     </a:p>
                   </a:txBody>
@@ -5020,7 +5020,7 @@
                         <a:rPr sz="800">
                           <a:latin typeface="Segoe UI"/>
                         </a:rPr>
-                        <a:t>88</a:t>
+                        <a:t>89</a:t>
                       </a:r>
                     </a:p>
                   </a:txBody>
